--- a/ads/software-basico/aulas-03-04-estruturas-decisao/Aula 03 - Estrutura de Decisão.pptx
+++ b/ads/software-basico/aulas-03-04-estruturas-decisao/Aula 03 - Estrutura de Decisão.pptx
@@ -1705,7 +1705,7 @@
             <a:fld id="{F81AA659-8FD3-461F-8FBC-BDBF8F913D9D}" type="datetimeFigureOut">
               <a:rPr lang="pt-BR" smtClean="0"/>
               <a:pPr/>
-              <a:t>26/08/2026</a:t>
+              <a:t>21/09/2026</a:t>
             </a:fld>
             <a:endParaRPr lang="pt-BR"/>
           </a:p>
@@ -10455,7 +10455,7 @@
                 </a:solidFill>
                 <a:latin typeface="Consolas" panose="020B0609020204030204" pitchFamily="49" charset="0"/>
               </a:rPr>
-              <a:t>elif</a:t>
+              <a:t>if</a:t>
             </a:r>
             <a:r>
               <a:rPr lang="pt-BR" sz="1800" dirty="0">
@@ -12136,7 +12136,7 @@
                 <a:latin typeface="Inter" pitchFamily="34" charset="0"/>
                 <a:ea typeface="Inter" pitchFamily="34" charset="-122"/>
               </a:rPr>
-              <a:t>Débito: pagamento sem juros e sem desconto.</a:t>
+              <a:t>Débito: pagamento com 2% de desconto sobre o valor da compra.</a:t>
             </a:r>
           </a:p>
           <a:p>
